--- a/public/downloads/ai-cybersecurity-awareness.pptx
+++ b/public/downloads/ai-cybersecurity-awareness.pptx
@@ -16,15 +16,23 @@
     <p:sldId id="264" r:id="rId10"/>
     <p:sldId id="265" r:id="rId11"/>
     <p:sldId id="266" r:id="rId12"/>
-    <p:sldId id="267" r:id="rId13"/>
-    <p:sldId id="269" r:id="rId14"/>
-    <p:sldId id="268" r:id="rId15"/>
-    <p:sldId id="270" r:id="rId16"/>
-    <p:sldId id="271" r:id="rId17"/>
-    <p:sldId id="272" r:id="rId18"/>
-    <p:sldId id="273" r:id="rId19"/>
-    <p:sldId id="274" r:id="rId20"/>
-    <p:sldId id="275" r:id="rId21"/>
+    <p:sldId id="276" r:id="rId13"/>
+    <p:sldId id="277" r:id="rId14"/>
+    <p:sldId id="278" r:id="rId15"/>
+    <p:sldId id="267" r:id="rId16"/>
+    <p:sldId id="279" r:id="rId17"/>
+    <p:sldId id="280" r:id="rId18"/>
+    <p:sldId id="281" r:id="rId19"/>
+    <p:sldId id="282" r:id="rId20"/>
+    <p:sldId id="283" r:id="rId21"/>
+    <p:sldId id="269" r:id="rId22"/>
+    <p:sldId id="268" r:id="rId23"/>
+    <p:sldId id="270" r:id="rId24"/>
+    <p:sldId id="271" r:id="rId25"/>
+    <p:sldId id="272" r:id="rId26"/>
+    <p:sldId id="273" r:id="rId27"/>
+    <p:sldId id="274" r:id="rId28"/>
+    <p:sldId id="275" r:id="rId29"/>
   </p:sldIdLst>
   <p:sldSz cx="12192000" cy="6858000"/>
   <p:notesSz cx="6858000" cy="9144000"/>
@@ -123,6 +131,11 @@
       </a:defRPr>
     </a:lvl9pPr>
   </p:defaultTextStyle>
+  <p:extLst>
+    <p:ext uri="{EFAFB233-063F-42B5-8137-9DF3F51BA10A}">
+      <p15:sldGuideLst xmlns:p15="http://schemas.microsoft.com/office/powerpoint/2012/main"/>
+    </p:ext>
+  </p:extLst>
 </p:presentation>
 </file>
 
@@ -275,7 +288,7 @@
           <a:p>
             <a:fld id="{DF3D845C-6848-481E-A77D-0F394B160C2D}" type="datetimeFigureOut">
               <a:rPr lang="en-IN" smtClean="0"/>
-              <a:t>05-06-2026</a:t>
+              <a:t>08-06-2026</a:t>
             </a:fld>
             <a:endParaRPr lang="en-IN"/>
           </a:p>
@@ -475,7 +488,7 @@
           <a:p>
             <a:fld id="{DF3D845C-6848-481E-A77D-0F394B160C2D}" type="datetimeFigureOut">
               <a:rPr lang="en-IN" smtClean="0"/>
-              <a:t>05-06-2026</a:t>
+              <a:t>08-06-2026</a:t>
             </a:fld>
             <a:endParaRPr lang="en-IN"/>
           </a:p>
@@ -685,7 +698,7 @@
           <a:p>
             <a:fld id="{DF3D845C-6848-481E-A77D-0F394B160C2D}" type="datetimeFigureOut">
               <a:rPr lang="en-IN" smtClean="0"/>
-              <a:t>05-06-2026</a:t>
+              <a:t>08-06-2026</a:t>
             </a:fld>
             <a:endParaRPr lang="en-IN"/>
           </a:p>
@@ -885,7 +898,7 @@
           <a:p>
             <a:fld id="{DF3D845C-6848-481E-A77D-0F394B160C2D}" type="datetimeFigureOut">
               <a:rPr lang="en-IN" smtClean="0"/>
-              <a:t>05-06-2026</a:t>
+              <a:t>08-06-2026</a:t>
             </a:fld>
             <a:endParaRPr lang="en-IN"/>
           </a:p>
@@ -1161,7 +1174,7 @@
           <a:p>
             <a:fld id="{DF3D845C-6848-481E-A77D-0F394B160C2D}" type="datetimeFigureOut">
               <a:rPr lang="en-IN" smtClean="0"/>
-              <a:t>05-06-2026</a:t>
+              <a:t>08-06-2026</a:t>
             </a:fld>
             <a:endParaRPr lang="en-IN"/>
           </a:p>
@@ -1429,7 +1442,7 @@
           <a:p>
             <a:fld id="{DF3D845C-6848-481E-A77D-0F394B160C2D}" type="datetimeFigureOut">
               <a:rPr lang="en-IN" smtClean="0"/>
-              <a:t>05-06-2026</a:t>
+              <a:t>08-06-2026</a:t>
             </a:fld>
             <a:endParaRPr lang="en-IN"/>
           </a:p>
@@ -1844,7 +1857,7 @@
           <a:p>
             <a:fld id="{DF3D845C-6848-481E-A77D-0F394B160C2D}" type="datetimeFigureOut">
               <a:rPr lang="en-IN" smtClean="0"/>
-              <a:t>05-06-2026</a:t>
+              <a:t>08-06-2026</a:t>
             </a:fld>
             <a:endParaRPr lang="en-IN"/>
           </a:p>
@@ -1986,7 +1999,7 @@
           <a:p>
             <a:fld id="{DF3D845C-6848-481E-A77D-0F394B160C2D}" type="datetimeFigureOut">
               <a:rPr lang="en-IN" smtClean="0"/>
-              <a:t>05-06-2026</a:t>
+              <a:t>08-06-2026</a:t>
             </a:fld>
             <a:endParaRPr lang="en-IN"/>
           </a:p>
@@ -2099,7 +2112,7 @@
           <a:p>
             <a:fld id="{DF3D845C-6848-481E-A77D-0F394B160C2D}" type="datetimeFigureOut">
               <a:rPr lang="en-IN" smtClean="0"/>
-              <a:t>05-06-2026</a:t>
+              <a:t>08-06-2026</a:t>
             </a:fld>
             <a:endParaRPr lang="en-IN"/>
           </a:p>
@@ -2412,7 +2425,7 @@
           <a:p>
             <a:fld id="{DF3D845C-6848-481E-A77D-0F394B160C2D}" type="datetimeFigureOut">
               <a:rPr lang="en-IN" smtClean="0"/>
-              <a:t>05-06-2026</a:t>
+              <a:t>08-06-2026</a:t>
             </a:fld>
             <a:endParaRPr lang="en-IN"/>
           </a:p>
@@ -2701,7 +2714,7 @@
           <a:p>
             <a:fld id="{DF3D845C-6848-481E-A77D-0F394B160C2D}" type="datetimeFigureOut">
               <a:rPr lang="en-IN" smtClean="0"/>
-              <a:t>05-06-2026</a:t>
+              <a:t>08-06-2026</a:t>
             </a:fld>
             <a:endParaRPr lang="en-IN"/>
           </a:p>
@@ -2944,7 +2957,7 @@
           <a:p>
             <a:fld id="{DF3D845C-6848-481E-A77D-0F394B160C2D}" type="datetimeFigureOut">
               <a:rPr lang="en-IN" smtClean="0"/>
-              <a:t>05-06-2026</a:t>
+              <a:t>08-06-2026</a:t>
             </a:fld>
             <a:endParaRPr lang="en-IN"/>
           </a:p>
@@ -3363,10 +3376,10 @@
       </p:grpSpPr>
       <p:pic>
         <p:nvPicPr>
-          <p:cNvPr id="5" name="Picture 4">
-            <a:extLst>
-              <a:ext uri="{FF2B5EF4-FFF2-40B4-BE49-F238E27FC236}">
-                <a16:creationId xmlns:a16="http://schemas.microsoft.com/office/drawing/2014/main" id="{DBE6B9E7-8AA4-40C4-643E-1F4C0B326F3A}"/>
+          <p:cNvPr id="3" name="Picture 2">
+            <a:extLst>
+              <a:ext uri="{FF2B5EF4-FFF2-40B4-BE49-F238E27FC236}">
+                <a16:creationId xmlns:a16="http://schemas.microsoft.com/office/drawing/2014/main" id="{84F32EEA-6578-353B-1E15-59EA64B894E3}"/>
               </a:ext>
             </a:extLst>
           </p:cNvPr>
@@ -3383,7 +3396,7 @@
         </p:blipFill>
         <p:spPr>
           <a:xfrm>
-            <a:off x="0" y="0"/>
+            <a:off x="0" y="7951"/>
             <a:ext cx="12192000" cy="6858000"/>
           </a:xfrm>
           <a:prstGeom prst="rect">
@@ -3541,6 +3554,198 @@
   <p:cSld>
     <p:spTree>
       <p:nvGrpSpPr>
+        <p:cNvPr id="1" name=""/>
+        <p:cNvGrpSpPr/>
+        <p:nvPr/>
+      </p:nvGrpSpPr>
+      <p:grpSpPr>
+        <a:xfrm>
+          <a:off x="0" y="0"/>
+          <a:ext cx="0" cy="0"/>
+          <a:chOff x="0" y="0"/>
+          <a:chExt cx="0" cy="0"/>
+        </a:xfrm>
+      </p:grpSpPr>
+      <p:pic>
+        <p:nvPicPr>
+          <p:cNvPr id="5" name="Picture 4">
+            <a:extLst>
+              <a:ext uri="{FF2B5EF4-FFF2-40B4-BE49-F238E27FC236}">
+                <a16:creationId xmlns:a16="http://schemas.microsoft.com/office/drawing/2014/main" id="{70123919-7DA8-084D-0F99-89528AF9812B}"/>
+              </a:ext>
+            </a:extLst>
+          </p:cNvPr>
+          <p:cNvPicPr>
+            <a:picLocks noChangeAspect="1"/>
+          </p:cNvPicPr>
+          <p:nvPr/>
+        </p:nvPicPr>
+        <p:blipFill>
+          <a:blip r:embed="rId2"/>
+          <a:stretch>
+            <a:fillRect/>
+          </a:stretch>
+        </p:blipFill>
+        <p:spPr>
+          <a:xfrm>
+            <a:off x="0" y="0"/>
+            <a:ext cx="12192000" cy="6858000"/>
+          </a:xfrm>
+          <a:prstGeom prst="rect">
+            <a:avLst/>
+          </a:prstGeom>
+        </p:spPr>
+      </p:pic>
+    </p:spTree>
+    <p:extLst>
+      <p:ext uri="{BB962C8B-B14F-4D97-AF65-F5344CB8AC3E}">
+        <p14:creationId xmlns:p14="http://schemas.microsoft.com/office/powerpoint/2010/main" val="443588445"/>
+      </p:ext>
+    </p:extLst>
+  </p:cSld>
+  <p:clrMapOvr>
+    <a:masterClrMapping/>
+  </p:clrMapOvr>
+</p:sld>
+</file>
+
+<file path=ppt/slides/slide13.xml><?xml version="1.0" encoding="utf-8"?>
+<p:sld xmlns:a="http://schemas.openxmlformats.org/drawingml/2006/main" xmlns:r="http://schemas.openxmlformats.org/officeDocument/2006/relationships" xmlns:p="http://schemas.openxmlformats.org/presentationml/2006/main">
+  <p:cSld>
+    <p:spTree>
+      <p:nvGrpSpPr>
+        <p:cNvPr id="1" name="">
+          <a:extLst>
+            <a:ext uri="{FF2B5EF4-FFF2-40B4-BE49-F238E27FC236}">
+              <a16:creationId xmlns:a16="http://schemas.microsoft.com/office/drawing/2014/main" id="{2B0937D4-5742-8364-EAA5-337718495424}"/>
+            </a:ext>
+          </a:extLst>
+        </p:cNvPr>
+        <p:cNvGrpSpPr/>
+        <p:nvPr/>
+      </p:nvGrpSpPr>
+      <p:grpSpPr>
+        <a:xfrm>
+          <a:off x="0" y="0"/>
+          <a:ext cx="0" cy="0"/>
+          <a:chOff x="0" y="0"/>
+          <a:chExt cx="0" cy="0"/>
+        </a:xfrm>
+      </p:grpSpPr>
+      <p:pic>
+        <p:nvPicPr>
+          <p:cNvPr id="3" name="Picture 2">
+            <a:extLst>
+              <a:ext uri="{FF2B5EF4-FFF2-40B4-BE49-F238E27FC236}">
+                <a16:creationId xmlns:a16="http://schemas.microsoft.com/office/drawing/2014/main" id="{11160C83-E8FC-D425-EEED-9836529CC58A}"/>
+              </a:ext>
+            </a:extLst>
+          </p:cNvPr>
+          <p:cNvPicPr>
+            <a:picLocks noChangeAspect="1"/>
+          </p:cNvPicPr>
+          <p:nvPr/>
+        </p:nvPicPr>
+        <p:blipFill>
+          <a:blip r:embed="rId2"/>
+          <a:stretch>
+            <a:fillRect/>
+          </a:stretch>
+        </p:blipFill>
+        <p:spPr>
+          <a:xfrm>
+            <a:off x="0" y="0"/>
+            <a:ext cx="12192000" cy="6858000"/>
+          </a:xfrm>
+          <a:prstGeom prst="rect">
+            <a:avLst/>
+          </a:prstGeom>
+        </p:spPr>
+      </p:pic>
+    </p:spTree>
+    <p:extLst>
+      <p:ext uri="{BB962C8B-B14F-4D97-AF65-F5344CB8AC3E}">
+        <p14:creationId xmlns:p14="http://schemas.microsoft.com/office/powerpoint/2010/main" val="3647283873"/>
+      </p:ext>
+    </p:extLst>
+  </p:cSld>
+  <p:clrMapOvr>
+    <a:masterClrMapping/>
+  </p:clrMapOvr>
+</p:sld>
+</file>
+
+<file path=ppt/slides/slide14.xml><?xml version="1.0" encoding="utf-8"?>
+<p:sld xmlns:a="http://schemas.openxmlformats.org/drawingml/2006/main" xmlns:r="http://schemas.openxmlformats.org/officeDocument/2006/relationships" xmlns:p="http://schemas.openxmlformats.org/presentationml/2006/main">
+  <p:cSld>
+    <p:spTree>
+      <p:nvGrpSpPr>
+        <p:cNvPr id="1" name="">
+          <a:extLst>
+            <a:ext uri="{FF2B5EF4-FFF2-40B4-BE49-F238E27FC236}">
+              <a16:creationId xmlns:a16="http://schemas.microsoft.com/office/drawing/2014/main" id="{7FA79D94-0FC7-BEAE-0973-9F60D8F0DA8D}"/>
+            </a:ext>
+          </a:extLst>
+        </p:cNvPr>
+        <p:cNvGrpSpPr/>
+        <p:nvPr/>
+      </p:nvGrpSpPr>
+      <p:grpSpPr>
+        <a:xfrm>
+          <a:off x="0" y="0"/>
+          <a:ext cx="0" cy="0"/>
+          <a:chOff x="0" y="0"/>
+          <a:chExt cx="0" cy="0"/>
+        </a:xfrm>
+      </p:grpSpPr>
+      <p:pic>
+        <p:nvPicPr>
+          <p:cNvPr id="3" name="Picture 2">
+            <a:extLst>
+              <a:ext uri="{FF2B5EF4-FFF2-40B4-BE49-F238E27FC236}">
+                <a16:creationId xmlns:a16="http://schemas.microsoft.com/office/drawing/2014/main" id="{DADCF843-9DA1-BC07-1019-ED4465FA2552}"/>
+              </a:ext>
+            </a:extLst>
+          </p:cNvPr>
+          <p:cNvPicPr>
+            <a:picLocks noChangeAspect="1"/>
+          </p:cNvPicPr>
+          <p:nvPr/>
+        </p:nvPicPr>
+        <p:blipFill>
+          <a:blip r:embed="rId2"/>
+          <a:stretch>
+            <a:fillRect/>
+          </a:stretch>
+        </p:blipFill>
+        <p:spPr>
+          <a:xfrm>
+            <a:off x="0" y="0"/>
+            <a:ext cx="12192000" cy="6858000"/>
+          </a:xfrm>
+          <a:prstGeom prst="rect">
+            <a:avLst/>
+          </a:prstGeom>
+        </p:spPr>
+      </p:pic>
+    </p:spTree>
+    <p:extLst>
+      <p:ext uri="{BB962C8B-B14F-4D97-AF65-F5344CB8AC3E}">
+        <p14:creationId xmlns:p14="http://schemas.microsoft.com/office/powerpoint/2010/main" val="3844800859"/>
+      </p:ext>
+    </p:extLst>
+  </p:cSld>
+  <p:clrMapOvr>
+    <a:masterClrMapping/>
+  </p:clrMapOvr>
+</p:sld>
+</file>
+
+<file path=ppt/slides/slide15.xml><?xml version="1.0" encoding="utf-8"?>
+<p:sld xmlns:a="http://schemas.openxmlformats.org/drawingml/2006/main" xmlns:r="http://schemas.openxmlformats.org/officeDocument/2006/relationships" xmlns:p="http://schemas.openxmlformats.org/presentationml/2006/main">
+  <p:cSld>
+    <p:spTree>
+      <p:nvGrpSpPr>
         <p:cNvPr id="1" name="">
           <a:extLst>
             <a:ext uri="{FF2B5EF4-FFF2-40B4-BE49-F238E27FC236}">
@@ -3602,7 +3807,7 @@
 </p:sld>
 </file>
 
-<file path=ppt/slides/slide13.xml><?xml version="1.0" encoding="utf-8"?>
+<file path=ppt/slides/slide16.xml><?xml version="1.0" encoding="utf-8"?>
 <p:sld xmlns:a="http://schemas.openxmlformats.org/drawingml/2006/main" xmlns:r="http://schemas.openxmlformats.org/officeDocument/2006/relationships" xmlns:p="http://schemas.openxmlformats.org/presentationml/2006/main">
   <p:cSld>
     <p:spTree>
@@ -3610,7 +3815,7 @@
         <p:cNvPr id="1" name="">
           <a:extLst>
             <a:ext uri="{FF2B5EF4-FFF2-40B4-BE49-F238E27FC236}">
-              <a16:creationId xmlns:a16="http://schemas.microsoft.com/office/drawing/2014/main" id="{3BB8320E-7C73-36E6-D02A-141680EA3638}"/>
+              <a16:creationId xmlns:a16="http://schemas.microsoft.com/office/drawing/2014/main" id="{8DD9169B-9800-7DDC-0EC7-405883016B65}"/>
             </a:ext>
           </a:extLst>
         </p:cNvPr>
@@ -3627,10 +3832,10 @@
       </p:grpSpPr>
       <p:pic>
         <p:nvPicPr>
-          <p:cNvPr id="3" name="Picture 2">
-            <a:extLst>
-              <a:ext uri="{FF2B5EF4-FFF2-40B4-BE49-F238E27FC236}">
-                <a16:creationId xmlns:a16="http://schemas.microsoft.com/office/drawing/2014/main" id="{B2E2A6A2-0A0E-6533-2C09-3CBDC146F3F9}"/>
+          <p:cNvPr id="6" name="Picture 5">
+            <a:extLst>
+              <a:ext uri="{FF2B5EF4-FFF2-40B4-BE49-F238E27FC236}">
+                <a16:creationId xmlns:a16="http://schemas.microsoft.com/office/drawing/2014/main" id="{89B23D58-B0ED-ABA8-1974-A9895EAF8042}"/>
               </a:ext>
             </a:extLst>
           </p:cNvPr>
@@ -3658,7 +3863,7 @@
     </p:spTree>
     <p:extLst>
       <p:ext uri="{BB962C8B-B14F-4D97-AF65-F5344CB8AC3E}">
-        <p14:creationId xmlns:p14="http://schemas.microsoft.com/office/powerpoint/2010/main" val="3944273049"/>
+        <p14:creationId xmlns:p14="http://schemas.microsoft.com/office/powerpoint/2010/main" val="664960728"/>
       </p:ext>
     </p:extLst>
   </p:cSld>
@@ -3668,7 +3873,7 @@
 </p:sld>
 </file>
 
-<file path=ppt/slides/slide14.xml><?xml version="1.0" encoding="utf-8"?>
+<file path=ppt/slides/slide17.xml><?xml version="1.0" encoding="utf-8"?>
 <p:sld xmlns:a="http://schemas.openxmlformats.org/drawingml/2006/main" xmlns:r="http://schemas.openxmlformats.org/officeDocument/2006/relationships" xmlns:p="http://schemas.openxmlformats.org/presentationml/2006/main">
   <p:cSld>
     <p:spTree>
@@ -3676,7 +3881,7 @@
         <p:cNvPr id="1" name="">
           <a:extLst>
             <a:ext uri="{FF2B5EF4-FFF2-40B4-BE49-F238E27FC236}">
-              <a16:creationId xmlns:a16="http://schemas.microsoft.com/office/drawing/2014/main" id="{F52CAF18-878E-4679-4D9D-199C06A23132}"/>
+              <a16:creationId xmlns:a16="http://schemas.microsoft.com/office/drawing/2014/main" id="{17B0201B-F780-2059-1176-DE90FE084EEF}"/>
             </a:ext>
           </a:extLst>
         </p:cNvPr>
@@ -3696,7 +3901,7 @@
           <p:cNvPr id="3" name="Picture 2">
             <a:extLst>
               <a:ext uri="{FF2B5EF4-FFF2-40B4-BE49-F238E27FC236}">
-                <a16:creationId xmlns:a16="http://schemas.microsoft.com/office/drawing/2014/main" id="{DA08A766-0B9F-136E-F136-4B066A1B2499}"/>
+                <a16:creationId xmlns:a16="http://schemas.microsoft.com/office/drawing/2014/main" id="{3EFE3D7B-74CD-0AE1-447F-1E4ACA6A6D3F}"/>
               </a:ext>
             </a:extLst>
           </p:cNvPr>
@@ -3724,7 +3929,7 @@
     </p:spTree>
     <p:extLst>
       <p:ext uri="{BB962C8B-B14F-4D97-AF65-F5344CB8AC3E}">
-        <p14:creationId xmlns:p14="http://schemas.microsoft.com/office/powerpoint/2010/main" val="4013252224"/>
+        <p14:creationId xmlns:p14="http://schemas.microsoft.com/office/powerpoint/2010/main" val="3107603134"/>
       </p:ext>
     </p:extLst>
   </p:cSld>
@@ -3734,7 +3939,7 @@
 </p:sld>
 </file>
 
-<file path=ppt/slides/slide15.xml><?xml version="1.0" encoding="utf-8"?>
+<file path=ppt/slides/slide18.xml><?xml version="1.0" encoding="utf-8"?>
 <p:sld xmlns:a="http://schemas.openxmlformats.org/drawingml/2006/main" xmlns:r="http://schemas.openxmlformats.org/officeDocument/2006/relationships" xmlns:p="http://schemas.openxmlformats.org/presentationml/2006/main">
   <p:cSld>
     <p:spTree>
@@ -3742,7 +3947,7 @@
         <p:cNvPr id="1" name="">
           <a:extLst>
             <a:ext uri="{FF2B5EF4-FFF2-40B4-BE49-F238E27FC236}">
-              <a16:creationId xmlns:a16="http://schemas.microsoft.com/office/drawing/2014/main" id="{3A58C92D-2A96-6BC2-DB26-9807447A06F6}"/>
+              <a16:creationId xmlns:a16="http://schemas.microsoft.com/office/drawing/2014/main" id="{C950A0CA-A178-16D9-4F89-F8ABBF748AC0}"/>
             </a:ext>
           </a:extLst>
         </p:cNvPr>
@@ -3762,7 +3967,7 @@
           <p:cNvPr id="3" name="Picture 2">
             <a:extLst>
               <a:ext uri="{FF2B5EF4-FFF2-40B4-BE49-F238E27FC236}">
-                <a16:creationId xmlns:a16="http://schemas.microsoft.com/office/drawing/2014/main" id="{F746DE3C-06F6-12F9-97D5-4F10D220D45D}"/>
+                <a16:creationId xmlns:a16="http://schemas.microsoft.com/office/drawing/2014/main" id="{BE3CC5CB-D043-240D-5CA3-0D8877482100}"/>
               </a:ext>
             </a:extLst>
           </p:cNvPr>
@@ -3790,7 +3995,7 @@
     </p:spTree>
     <p:extLst>
       <p:ext uri="{BB962C8B-B14F-4D97-AF65-F5344CB8AC3E}">
-        <p14:creationId xmlns:p14="http://schemas.microsoft.com/office/powerpoint/2010/main" val="1731731091"/>
+        <p14:creationId xmlns:p14="http://schemas.microsoft.com/office/powerpoint/2010/main" val="740203482"/>
       </p:ext>
     </p:extLst>
   </p:cSld>
@@ -3800,7 +4005,7 @@
 </p:sld>
 </file>
 
-<file path=ppt/slides/slide16.xml><?xml version="1.0" encoding="utf-8"?>
+<file path=ppt/slides/slide19.xml><?xml version="1.0" encoding="utf-8"?>
 <p:sld xmlns:a="http://schemas.openxmlformats.org/drawingml/2006/main" xmlns:r="http://schemas.openxmlformats.org/officeDocument/2006/relationships" xmlns:p="http://schemas.openxmlformats.org/presentationml/2006/main">
   <p:cSld>
     <p:spTree>
@@ -3808,7 +4013,7 @@
         <p:cNvPr id="1" name="">
           <a:extLst>
             <a:ext uri="{FF2B5EF4-FFF2-40B4-BE49-F238E27FC236}">
-              <a16:creationId xmlns:a16="http://schemas.microsoft.com/office/drawing/2014/main" id="{4325D6E0-D5B2-4890-EFA3-F32DFB927AA3}"/>
+              <a16:creationId xmlns:a16="http://schemas.microsoft.com/office/drawing/2014/main" id="{25B595D4-3CB1-B318-0703-41735D2E1F07}"/>
             </a:ext>
           </a:extLst>
         </p:cNvPr>
@@ -3825,10 +4030,10 @@
       </p:grpSpPr>
       <p:pic>
         <p:nvPicPr>
-          <p:cNvPr id="3" name="Picture 2">
-            <a:extLst>
-              <a:ext uri="{FF2B5EF4-FFF2-40B4-BE49-F238E27FC236}">
-                <a16:creationId xmlns:a16="http://schemas.microsoft.com/office/drawing/2014/main" id="{218A07DC-F8C8-1168-5D24-0B4185A25848}"/>
+          <p:cNvPr id="4" name="Picture 3">
+            <a:extLst>
+              <a:ext uri="{FF2B5EF4-FFF2-40B4-BE49-F238E27FC236}">
+                <a16:creationId xmlns:a16="http://schemas.microsoft.com/office/drawing/2014/main" id="{83ECB0E4-495F-4A10-FFA0-FE11939EC6E4}"/>
               </a:ext>
             </a:extLst>
           </p:cNvPr>
@@ -3856,205 +4061,7 @@
     </p:spTree>
     <p:extLst>
       <p:ext uri="{BB962C8B-B14F-4D97-AF65-F5344CB8AC3E}">
-        <p14:creationId xmlns:p14="http://schemas.microsoft.com/office/powerpoint/2010/main" val="2826613559"/>
-      </p:ext>
-    </p:extLst>
-  </p:cSld>
-  <p:clrMapOvr>
-    <a:masterClrMapping/>
-  </p:clrMapOvr>
-</p:sld>
-</file>
-
-<file path=ppt/slides/slide17.xml><?xml version="1.0" encoding="utf-8"?>
-<p:sld xmlns:a="http://schemas.openxmlformats.org/drawingml/2006/main" xmlns:r="http://schemas.openxmlformats.org/officeDocument/2006/relationships" xmlns:p="http://schemas.openxmlformats.org/presentationml/2006/main">
-  <p:cSld>
-    <p:spTree>
-      <p:nvGrpSpPr>
-        <p:cNvPr id="1" name="">
-          <a:extLst>
-            <a:ext uri="{FF2B5EF4-FFF2-40B4-BE49-F238E27FC236}">
-              <a16:creationId xmlns:a16="http://schemas.microsoft.com/office/drawing/2014/main" id="{57AC6250-95C6-5129-E810-E6E713691FBC}"/>
-            </a:ext>
-          </a:extLst>
-        </p:cNvPr>
-        <p:cNvGrpSpPr/>
-        <p:nvPr/>
-      </p:nvGrpSpPr>
-      <p:grpSpPr>
-        <a:xfrm>
-          <a:off x="0" y="0"/>
-          <a:ext cx="0" cy="0"/>
-          <a:chOff x="0" y="0"/>
-          <a:chExt cx="0" cy="0"/>
-        </a:xfrm>
-      </p:grpSpPr>
-      <p:pic>
-        <p:nvPicPr>
-          <p:cNvPr id="3" name="Picture 2">
-            <a:extLst>
-              <a:ext uri="{FF2B5EF4-FFF2-40B4-BE49-F238E27FC236}">
-                <a16:creationId xmlns:a16="http://schemas.microsoft.com/office/drawing/2014/main" id="{DDFAED89-0E7B-316D-8342-5C03E45DAAA5}"/>
-              </a:ext>
-            </a:extLst>
-          </p:cNvPr>
-          <p:cNvPicPr>
-            <a:picLocks noChangeAspect="1"/>
-          </p:cNvPicPr>
-          <p:nvPr/>
-        </p:nvPicPr>
-        <p:blipFill>
-          <a:blip r:embed="rId2"/>
-          <a:stretch>
-            <a:fillRect/>
-          </a:stretch>
-        </p:blipFill>
-        <p:spPr>
-          <a:xfrm>
-            <a:off x="0" y="0"/>
-            <a:ext cx="12192000" cy="6858000"/>
-          </a:xfrm>
-          <a:prstGeom prst="rect">
-            <a:avLst/>
-          </a:prstGeom>
-        </p:spPr>
-      </p:pic>
-    </p:spTree>
-    <p:extLst>
-      <p:ext uri="{BB962C8B-B14F-4D97-AF65-F5344CB8AC3E}">
-        <p14:creationId xmlns:p14="http://schemas.microsoft.com/office/powerpoint/2010/main" val="2450499849"/>
-      </p:ext>
-    </p:extLst>
-  </p:cSld>
-  <p:clrMapOvr>
-    <a:masterClrMapping/>
-  </p:clrMapOvr>
-</p:sld>
-</file>
-
-<file path=ppt/slides/slide18.xml><?xml version="1.0" encoding="utf-8"?>
-<p:sld xmlns:a="http://schemas.openxmlformats.org/drawingml/2006/main" xmlns:r="http://schemas.openxmlformats.org/officeDocument/2006/relationships" xmlns:p="http://schemas.openxmlformats.org/presentationml/2006/main">
-  <p:cSld>
-    <p:spTree>
-      <p:nvGrpSpPr>
-        <p:cNvPr id="1" name="">
-          <a:extLst>
-            <a:ext uri="{FF2B5EF4-FFF2-40B4-BE49-F238E27FC236}">
-              <a16:creationId xmlns:a16="http://schemas.microsoft.com/office/drawing/2014/main" id="{583F8636-7DBC-6F42-5A7A-B49934DD6DCB}"/>
-            </a:ext>
-          </a:extLst>
-        </p:cNvPr>
-        <p:cNvGrpSpPr/>
-        <p:nvPr/>
-      </p:nvGrpSpPr>
-      <p:grpSpPr>
-        <a:xfrm>
-          <a:off x="0" y="0"/>
-          <a:ext cx="0" cy="0"/>
-          <a:chOff x="0" y="0"/>
-          <a:chExt cx="0" cy="0"/>
-        </a:xfrm>
-      </p:grpSpPr>
-      <p:pic>
-        <p:nvPicPr>
-          <p:cNvPr id="3" name="Picture 2">
-            <a:extLst>
-              <a:ext uri="{FF2B5EF4-FFF2-40B4-BE49-F238E27FC236}">
-                <a16:creationId xmlns:a16="http://schemas.microsoft.com/office/drawing/2014/main" id="{129F188A-4B52-42FC-734F-DCE744002B93}"/>
-              </a:ext>
-            </a:extLst>
-          </p:cNvPr>
-          <p:cNvPicPr>
-            <a:picLocks noChangeAspect="1"/>
-          </p:cNvPicPr>
-          <p:nvPr/>
-        </p:nvPicPr>
-        <p:blipFill>
-          <a:blip r:embed="rId2"/>
-          <a:stretch>
-            <a:fillRect/>
-          </a:stretch>
-        </p:blipFill>
-        <p:spPr>
-          <a:xfrm>
-            <a:off x="0" y="0"/>
-            <a:ext cx="12192000" cy="6858000"/>
-          </a:xfrm>
-          <a:prstGeom prst="rect">
-            <a:avLst/>
-          </a:prstGeom>
-        </p:spPr>
-      </p:pic>
-    </p:spTree>
-    <p:extLst>
-      <p:ext uri="{BB962C8B-B14F-4D97-AF65-F5344CB8AC3E}">
-        <p14:creationId xmlns:p14="http://schemas.microsoft.com/office/powerpoint/2010/main" val="2167852362"/>
-      </p:ext>
-    </p:extLst>
-  </p:cSld>
-  <p:clrMapOvr>
-    <a:masterClrMapping/>
-  </p:clrMapOvr>
-</p:sld>
-</file>
-
-<file path=ppt/slides/slide19.xml><?xml version="1.0" encoding="utf-8"?>
-<p:sld xmlns:a="http://schemas.openxmlformats.org/drawingml/2006/main" xmlns:r="http://schemas.openxmlformats.org/officeDocument/2006/relationships" xmlns:p="http://schemas.openxmlformats.org/presentationml/2006/main">
-  <p:cSld>
-    <p:spTree>
-      <p:nvGrpSpPr>
-        <p:cNvPr id="1" name="">
-          <a:extLst>
-            <a:ext uri="{FF2B5EF4-FFF2-40B4-BE49-F238E27FC236}">
-              <a16:creationId xmlns:a16="http://schemas.microsoft.com/office/drawing/2014/main" id="{C393372D-F17D-E179-59B0-E379F6F7189C}"/>
-            </a:ext>
-          </a:extLst>
-        </p:cNvPr>
-        <p:cNvGrpSpPr/>
-        <p:nvPr/>
-      </p:nvGrpSpPr>
-      <p:grpSpPr>
-        <a:xfrm>
-          <a:off x="0" y="0"/>
-          <a:ext cx="0" cy="0"/>
-          <a:chOff x="0" y="0"/>
-          <a:chExt cx="0" cy="0"/>
-        </a:xfrm>
-      </p:grpSpPr>
-      <p:pic>
-        <p:nvPicPr>
-          <p:cNvPr id="3" name="Picture 2">
-            <a:extLst>
-              <a:ext uri="{FF2B5EF4-FFF2-40B4-BE49-F238E27FC236}">
-                <a16:creationId xmlns:a16="http://schemas.microsoft.com/office/drawing/2014/main" id="{37489126-C223-F754-364D-97D7CFE08470}"/>
-              </a:ext>
-            </a:extLst>
-          </p:cNvPr>
-          <p:cNvPicPr>
-            <a:picLocks noChangeAspect="1"/>
-          </p:cNvPicPr>
-          <p:nvPr/>
-        </p:nvPicPr>
-        <p:blipFill>
-          <a:blip r:embed="rId2"/>
-          <a:stretch>
-            <a:fillRect/>
-          </a:stretch>
-        </p:blipFill>
-        <p:spPr>
-          <a:xfrm>
-            <a:off x="0" y="0"/>
-            <a:ext cx="12192000" cy="6858000"/>
-          </a:xfrm>
-          <a:prstGeom prst="rect">
-            <a:avLst/>
-          </a:prstGeom>
-        </p:spPr>
-      </p:pic>
-    </p:spTree>
-    <p:extLst>
-      <p:ext uri="{BB962C8B-B14F-4D97-AF65-F5344CB8AC3E}">
-        <p14:creationId xmlns:p14="http://schemas.microsoft.com/office/powerpoint/2010/main" val="1278062219"/>
+        <p14:creationId xmlns:p14="http://schemas.microsoft.com/office/powerpoint/2010/main" val="3538114126"/>
       </p:ext>
     </p:extLst>
   </p:cSld>
@@ -4131,6 +4138,534 @@
 </file>
 
 <file path=ppt/slides/slide20.xml><?xml version="1.0" encoding="utf-8"?>
+<p:sld xmlns:a="http://schemas.openxmlformats.org/drawingml/2006/main" xmlns:r="http://schemas.openxmlformats.org/officeDocument/2006/relationships" xmlns:p="http://schemas.openxmlformats.org/presentationml/2006/main">
+  <p:cSld>
+    <p:spTree>
+      <p:nvGrpSpPr>
+        <p:cNvPr id="1" name="">
+          <a:extLst>
+            <a:ext uri="{FF2B5EF4-FFF2-40B4-BE49-F238E27FC236}">
+              <a16:creationId xmlns:a16="http://schemas.microsoft.com/office/drawing/2014/main" id="{1C8F60EC-1E73-553C-4868-507358EDD93D}"/>
+            </a:ext>
+          </a:extLst>
+        </p:cNvPr>
+        <p:cNvGrpSpPr/>
+        <p:nvPr/>
+      </p:nvGrpSpPr>
+      <p:grpSpPr>
+        <a:xfrm>
+          <a:off x="0" y="0"/>
+          <a:ext cx="0" cy="0"/>
+          <a:chOff x="0" y="0"/>
+          <a:chExt cx="0" cy="0"/>
+        </a:xfrm>
+      </p:grpSpPr>
+      <p:pic>
+        <p:nvPicPr>
+          <p:cNvPr id="4" name="Picture 3">
+            <a:extLst>
+              <a:ext uri="{FF2B5EF4-FFF2-40B4-BE49-F238E27FC236}">
+                <a16:creationId xmlns:a16="http://schemas.microsoft.com/office/drawing/2014/main" id="{F23D875E-CF57-03CA-7AB4-4B233008CEE7}"/>
+              </a:ext>
+            </a:extLst>
+          </p:cNvPr>
+          <p:cNvPicPr>
+            <a:picLocks noChangeAspect="1"/>
+          </p:cNvPicPr>
+          <p:nvPr/>
+        </p:nvPicPr>
+        <p:blipFill>
+          <a:blip r:embed="rId2"/>
+          <a:stretch>
+            <a:fillRect/>
+          </a:stretch>
+        </p:blipFill>
+        <p:spPr>
+          <a:xfrm>
+            <a:off x="0" y="7951"/>
+            <a:ext cx="12192000" cy="6858000"/>
+          </a:xfrm>
+          <a:prstGeom prst="rect">
+            <a:avLst/>
+          </a:prstGeom>
+        </p:spPr>
+      </p:pic>
+    </p:spTree>
+    <p:extLst>
+      <p:ext uri="{BB962C8B-B14F-4D97-AF65-F5344CB8AC3E}">
+        <p14:creationId xmlns:p14="http://schemas.microsoft.com/office/powerpoint/2010/main" val="1237118491"/>
+      </p:ext>
+    </p:extLst>
+  </p:cSld>
+  <p:clrMapOvr>
+    <a:masterClrMapping/>
+  </p:clrMapOvr>
+</p:sld>
+</file>
+
+<file path=ppt/slides/slide21.xml><?xml version="1.0" encoding="utf-8"?>
+<p:sld xmlns:a="http://schemas.openxmlformats.org/drawingml/2006/main" xmlns:r="http://schemas.openxmlformats.org/officeDocument/2006/relationships" xmlns:p="http://schemas.openxmlformats.org/presentationml/2006/main">
+  <p:cSld>
+    <p:spTree>
+      <p:nvGrpSpPr>
+        <p:cNvPr id="1" name="">
+          <a:extLst>
+            <a:ext uri="{FF2B5EF4-FFF2-40B4-BE49-F238E27FC236}">
+              <a16:creationId xmlns:a16="http://schemas.microsoft.com/office/drawing/2014/main" id="{3BB8320E-7C73-36E6-D02A-141680EA3638}"/>
+            </a:ext>
+          </a:extLst>
+        </p:cNvPr>
+        <p:cNvGrpSpPr/>
+        <p:nvPr/>
+      </p:nvGrpSpPr>
+      <p:grpSpPr>
+        <a:xfrm>
+          <a:off x="0" y="0"/>
+          <a:ext cx="0" cy="0"/>
+          <a:chOff x="0" y="0"/>
+          <a:chExt cx="0" cy="0"/>
+        </a:xfrm>
+      </p:grpSpPr>
+      <p:pic>
+        <p:nvPicPr>
+          <p:cNvPr id="3" name="Picture 2">
+            <a:extLst>
+              <a:ext uri="{FF2B5EF4-FFF2-40B4-BE49-F238E27FC236}">
+                <a16:creationId xmlns:a16="http://schemas.microsoft.com/office/drawing/2014/main" id="{B2E2A6A2-0A0E-6533-2C09-3CBDC146F3F9}"/>
+              </a:ext>
+            </a:extLst>
+          </p:cNvPr>
+          <p:cNvPicPr>
+            <a:picLocks noChangeAspect="1"/>
+          </p:cNvPicPr>
+          <p:nvPr/>
+        </p:nvPicPr>
+        <p:blipFill>
+          <a:blip r:embed="rId2"/>
+          <a:stretch>
+            <a:fillRect/>
+          </a:stretch>
+        </p:blipFill>
+        <p:spPr>
+          <a:xfrm>
+            <a:off x="0" y="0"/>
+            <a:ext cx="12192000" cy="6858000"/>
+          </a:xfrm>
+          <a:prstGeom prst="rect">
+            <a:avLst/>
+          </a:prstGeom>
+        </p:spPr>
+      </p:pic>
+    </p:spTree>
+    <p:extLst>
+      <p:ext uri="{BB962C8B-B14F-4D97-AF65-F5344CB8AC3E}">
+        <p14:creationId xmlns:p14="http://schemas.microsoft.com/office/powerpoint/2010/main" val="3944273049"/>
+      </p:ext>
+    </p:extLst>
+  </p:cSld>
+  <p:clrMapOvr>
+    <a:masterClrMapping/>
+  </p:clrMapOvr>
+</p:sld>
+</file>
+
+<file path=ppt/slides/slide22.xml><?xml version="1.0" encoding="utf-8"?>
+<p:sld xmlns:a="http://schemas.openxmlformats.org/drawingml/2006/main" xmlns:r="http://schemas.openxmlformats.org/officeDocument/2006/relationships" xmlns:p="http://schemas.openxmlformats.org/presentationml/2006/main">
+  <p:cSld>
+    <p:spTree>
+      <p:nvGrpSpPr>
+        <p:cNvPr id="1" name="">
+          <a:extLst>
+            <a:ext uri="{FF2B5EF4-FFF2-40B4-BE49-F238E27FC236}">
+              <a16:creationId xmlns:a16="http://schemas.microsoft.com/office/drawing/2014/main" id="{F52CAF18-878E-4679-4D9D-199C06A23132}"/>
+            </a:ext>
+          </a:extLst>
+        </p:cNvPr>
+        <p:cNvGrpSpPr/>
+        <p:nvPr/>
+      </p:nvGrpSpPr>
+      <p:grpSpPr>
+        <a:xfrm>
+          <a:off x="0" y="0"/>
+          <a:ext cx="0" cy="0"/>
+          <a:chOff x="0" y="0"/>
+          <a:chExt cx="0" cy="0"/>
+        </a:xfrm>
+      </p:grpSpPr>
+      <p:pic>
+        <p:nvPicPr>
+          <p:cNvPr id="3" name="Picture 2">
+            <a:extLst>
+              <a:ext uri="{FF2B5EF4-FFF2-40B4-BE49-F238E27FC236}">
+                <a16:creationId xmlns:a16="http://schemas.microsoft.com/office/drawing/2014/main" id="{DA08A766-0B9F-136E-F136-4B066A1B2499}"/>
+              </a:ext>
+            </a:extLst>
+          </p:cNvPr>
+          <p:cNvPicPr>
+            <a:picLocks noChangeAspect="1"/>
+          </p:cNvPicPr>
+          <p:nvPr/>
+        </p:nvPicPr>
+        <p:blipFill>
+          <a:blip r:embed="rId2"/>
+          <a:stretch>
+            <a:fillRect/>
+          </a:stretch>
+        </p:blipFill>
+        <p:spPr>
+          <a:xfrm>
+            <a:off x="0" y="0"/>
+            <a:ext cx="12192000" cy="6858000"/>
+          </a:xfrm>
+          <a:prstGeom prst="rect">
+            <a:avLst/>
+          </a:prstGeom>
+        </p:spPr>
+      </p:pic>
+    </p:spTree>
+    <p:extLst>
+      <p:ext uri="{BB962C8B-B14F-4D97-AF65-F5344CB8AC3E}">
+        <p14:creationId xmlns:p14="http://schemas.microsoft.com/office/powerpoint/2010/main" val="4013252224"/>
+      </p:ext>
+    </p:extLst>
+  </p:cSld>
+  <p:clrMapOvr>
+    <a:masterClrMapping/>
+  </p:clrMapOvr>
+</p:sld>
+</file>
+
+<file path=ppt/slides/slide23.xml><?xml version="1.0" encoding="utf-8"?>
+<p:sld xmlns:a="http://schemas.openxmlformats.org/drawingml/2006/main" xmlns:r="http://schemas.openxmlformats.org/officeDocument/2006/relationships" xmlns:p="http://schemas.openxmlformats.org/presentationml/2006/main">
+  <p:cSld>
+    <p:spTree>
+      <p:nvGrpSpPr>
+        <p:cNvPr id="1" name="">
+          <a:extLst>
+            <a:ext uri="{FF2B5EF4-FFF2-40B4-BE49-F238E27FC236}">
+              <a16:creationId xmlns:a16="http://schemas.microsoft.com/office/drawing/2014/main" id="{3A58C92D-2A96-6BC2-DB26-9807447A06F6}"/>
+            </a:ext>
+          </a:extLst>
+        </p:cNvPr>
+        <p:cNvGrpSpPr/>
+        <p:nvPr/>
+      </p:nvGrpSpPr>
+      <p:grpSpPr>
+        <a:xfrm>
+          <a:off x="0" y="0"/>
+          <a:ext cx="0" cy="0"/>
+          <a:chOff x="0" y="0"/>
+          <a:chExt cx="0" cy="0"/>
+        </a:xfrm>
+      </p:grpSpPr>
+      <p:pic>
+        <p:nvPicPr>
+          <p:cNvPr id="3" name="Picture 2">
+            <a:extLst>
+              <a:ext uri="{FF2B5EF4-FFF2-40B4-BE49-F238E27FC236}">
+                <a16:creationId xmlns:a16="http://schemas.microsoft.com/office/drawing/2014/main" id="{F746DE3C-06F6-12F9-97D5-4F10D220D45D}"/>
+              </a:ext>
+            </a:extLst>
+          </p:cNvPr>
+          <p:cNvPicPr>
+            <a:picLocks noChangeAspect="1"/>
+          </p:cNvPicPr>
+          <p:nvPr/>
+        </p:nvPicPr>
+        <p:blipFill>
+          <a:blip r:embed="rId2"/>
+          <a:stretch>
+            <a:fillRect/>
+          </a:stretch>
+        </p:blipFill>
+        <p:spPr>
+          <a:xfrm>
+            <a:off x="0" y="0"/>
+            <a:ext cx="12192000" cy="6858000"/>
+          </a:xfrm>
+          <a:prstGeom prst="rect">
+            <a:avLst/>
+          </a:prstGeom>
+        </p:spPr>
+      </p:pic>
+    </p:spTree>
+    <p:extLst>
+      <p:ext uri="{BB962C8B-B14F-4D97-AF65-F5344CB8AC3E}">
+        <p14:creationId xmlns:p14="http://schemas.microsoft.com/office/powerpoint/2010/main" val="1731731091"/>
+      </p:ext>
+    </p:extLst>
+  </p:cSld>
+  <p:clrMapOvr>
+    <a:masterClrMapping/>
+  </p:clrMapOvr>
+</p:sld>
+</file>
+
+<file path=ppt/slides/slide24.xml><?xml version="1.0" encoding="utf-8"?>
+<p:sld xmlns:a="http://schemas.openxmlformats.org/drawingml/2006/main" xmlns:r="http://schemas.openxmlformats.org/officeDocument/2006/relationships" xmlns:p="http://schemas.openxmlformats.org/presentationml/2006/main">
+  <p:cSld>
+    <p:spTree>
+      <p:nvGrpSpPr>
+        <p:cNvPr id="1" name="">
+          <a:extLst>
+            <a:ext uri="{FF2B5EF4-FFF2-40B4-BE49-F238E27FC236}">
+              <a16:creationId xmlns:a16="http://schemas.microsoft.com/office/drawing/2014/main" id="{4325D6E0-D5B2-4890-EFA3-F32DFB927AA3}"/>
+            </a:ext>
+          </a:extLst>
+        </p:cNvPr>
+        <p:cNvGrpSpPr/>
+        <p:nvPr/>
+      </p:nvGrpSpPr>
+      <p:grpSpPr>
+        <a:xfrm>
+          <a:off x="0" y="0"/>
+          <a:ext cx="0" cy="0"/>
+          <a:chOff x="0" y="0"/>
+          <a:chExt cx="0" cy="0"/>
+        </a:xfrm>
+      </p:grpSpPr>
+      <p:pic>
+        <p:nvPicPr>
+          <p:cNvPr id="3" name="Picture 2">
+            <a:extLst>
+              <a:ext uri="{FF2B5EF4-FFF2-40B4-BE49-F238E27FC236}">
+                <a16:creationId xmlns:a16="http://schemas.microsoft.com/office/drawing/2014/main" id="{218A07DC-F8C8-1168-5D24-0B4185A25848}"/>
+              </a:ext>
+            </a:extLst>
+          </p:cNvPr>
+          <p:cNvPicPr>
+            <a:picLocks noChangeAspect="1"/>
+          </p:cNvPicPr>
+          <p:nvPr/>
+        </p:nvPicPr>
+        <p:blipFill>
+          <a:blip r:embed="rId2"/>
+          <a:stretch>
+            <a:fillRect/>
+          </a:stretch>
+        </p:blipFill>
+        <p:spPr>
+          <a:xfrm>
+            <a:off x="0" y="0"/>
+            <a:ext cx="12192000" cy="6858000"/>
+          </a:xfrm>
+          <a:prstGeom prst="rect">
+            <a:avLst/>
+          </a:prstGeom>
+        </p:spPr>
+      </p:pic>
+    </p:spTree>
+    <p:extLst>
+      <p:ext uri="{BB962C8B-B14F-4D97-AF65-F5344CB8AC3E}">
+        <p14:creationId xmlns:p14="http://schemas.microsoft.com/office/powerpoint/2010/main" val="2826613559"/>
+      </p:ext>
+    </p:extLst>
+  </p:cSld>
+  <p:clrMapOvr>
+    <a:masterClrMapping/>
+  </p:clrMapOvr>
+</p:sld>
+</file>
+
+<file path=ppt/slides/slide25.xml><?xml version="1.0" encoding="utf-8"?>
+<p:sld xmlns:a="http://schemas.openxmlformats.org/drawingml/2006/main" xmlns:r="http://schemas.openxmlformats.org/officeDocument/2006/relationships" xmlns:p="http://schemas.openxmlformats.org/presentationml/2006/main">
+  <p:cSld>
+    <p:spTree>
+      <p:nvGrpSpPr>
+        <p:cNvPr id="1" name="">
+          <a:extLst>
+            <a:ext uri="{FF2B5EF4-FFF2-40B4-BE49-F238E27FC236}">
+              <a16:creationId xmlns:a16="http://schemas.microsoft.com/office/drawing/2014/main" id="{57AC6250-95C6-5129-E810-E6E713691FBC}"/>
+            </a:ext>
+          </a:extLst>
+        </p:cNvPr>
+        <p:cNvGrpSpPr/>
+        <p:nvPr/>
+      </p:nvGrpSpPr>
+      <p:grpSpPr>
+        <a:xfrm>
+          <a:off x="0" y="0"/>
+          <a:ext cx="0" cy="0"/>
+          <a:chOff x="0" y="0"/>
+          <a:chExt cx="0" cy="0"/>
+        </a:xfrm>
+      </p:grpSpPr>
+      <p:pic>
+        <p:nvPicPr>
+          <p:cNvPr id="3" name="Picture 2">
+            <a:extLst>
+              <a:ext uri="{FF2B5EF4-FFF2-40B4-BE49-F238E27FC236}">
+                <a16:creationId xmlns:a16="http://schemas.microsoft.com/office/drawing/2014/main" id="{DDFAED89-0E7B-316D-8342-5C03E45DAAA5}"/>
+              </a:ext>
+            </a:extLst>
+          </p:cNvPr>
+          <p:cNvPicPr>
+            <a:picLocks noChangeAspect="1"/>
+          </p:cNvPicPr>
+          <p:nvPr/>
+        </p:nvPicPr>
+        <p:blipFill>
+          <a:blip r:embed="rId2"/>
+          <a:stretch>
+            <a:fillRect/>
+          </a:stretch>
+        </p:blipFill>
+        <p:spPr>
+          <a:xfrm>
+            <a:off x="0" y="0"/>
+            <a:ext cx="12192000" cy="6858000"/>
+          </a:xfrm>
+          <a:prstGeom prst="rect">
+            <a:avLst/>
+          </a:prstGeom>
+        </p:spPr>
+      </p:pic>
+    </p:spTree>
+    <p:extLst>
+      <p:ext uri="{BB962C8B-B14F-4D97-AF65-F5344CB8AC3E}">
+        <p14:creationId xmlns:p14="http://schemas.microsoft.com/office/powerpoint/2010/main" val="2450499849"/>
+      </p:ext>
+    </p:extLst>
+  </p:cSld>
+  <p:clrMapOvr>
+    <a:masterClrMapping/>
+  </p:clrMapOvr>
+</p:sld>
+</file>
+
+<file path=ppt/slides/slide26.xml><?xml version="1.0" encoding="utf-8"?>
+<p:sld xmlns:a="http://schemas.openxmlformats.org/drawingml/2006/main" xmlns:r="http://schemas.openxmlformats.org/officeDocument/2006/relationships" xmlns:p="http://schemas.openxmlformats.org/presentationml/2006/main">
+  <p:cSld>
+    <p:spTree>
+      <p:nvGrpSpPr>
+        <p:cNvPr id="1" name="">
+          <a:extLst>
+            <a:ext uri="{FF2B5EF4-FFF2-40B4-BE49-F238E27FC236}">
+              <a16:creationId xmlns:a16="http://schemas.microsoft.com/office/drawing/2014/main" id="{583F8636-7DBC-6F42-5A7A-B49934DD6DCB}"/>
+            </a:ext>
+          </a:extLst>
+        </p:cNvPr>
+        <p:cNvGrpSpPr/>
+        <p:nvPr/>
+      </p:nvGrpSpPr>
+      <p:grpSpPr>
+        <a:xfrm>
+          <a:off x="0" y="0"/>
+          <a:ext cx="0" cy="0"/>
+          <a:chOff x="0" y="0"/>
+          <a:chExt cx="0" cy="0"/>
+        </a:xfrm>
+      </p:grpSpPr>
+      <p:pic>
+        <p:nvPicPr>
+          <p:cNvPr id="3" name="Picture 2">
+            <a:extLst>
+              <a:ext uri="{FF2B5EF4-FFF2-40B4-BE49-F238E27FC236}">
+                <a16:creationId xmlns:a16="http://schemas.microsoft.com/office/drawing/2014/main" id="{129F188A-4B52-42FC-734F-DCE744002B93}"/>
+              </a:ext>
+            </a:extLst>
+          </p:cNvPr>
+          <p:cNvPicPr>
+            <a:picLocks noChangeAspect="1"/>
+          </p:cNvPicPr>
+          <p:nvPr/>
+        </p:nvPicPr>
+        <p:blipFill>
+          <a:blip r:embed="rId2"/>
+          <a:stretch>
+            <a:fillRect/>
+          </a:stretch>
+        </p:blipFill>
+        <p:spPr>
+          <a:xfrm>
+            <a:off x="0" y="0"/>
+            <a:ext cx="12192000" cy="6858000"/>
+          </a:xfrm>
+          <a:prstGeom prst="rect">
+            <a:avLst/>
+          </a:prstGeom>
+        </p:spPr>
+      </p:pic>
+    </p:spTree>
+    <p:extLst>
+      <p:ext uri="{BB962C8B-B14F-4D97-AF65-F5344CB8AC3E}">
+        <p14:creationId xmlns:p14="http://schemas.microsoft.com/office/powerpoint/2010/main" val="2167852362"/>
+      </p:ext>
+    </p:extLst>
+  </p:cSld>
+  <p:clrMapOvr>
+    <a:masterClrMapping/>
+  </p:clrMapOvr>
+</p:sld>
+</file>
+
+<file path=ppt/slides/slide27.xml><?xml version="1.0" encoding="utf-8"?>
+<p:sld xmlns:a="http://schemas.openxmlformats.org/drawingml/2006/main" xmlns:r="http://schemas.openxmlformats.org/officeDocument/2006/relationships" xmlns:p="http://schemas.openxmlformats.org/presentationml/2006/main">
+  <p:cSld>
+    <p:spTree>
+      <p:nvGrpSpPr>
+        <p:cNvPr id="1" name="">
+          <a:extLst>
+            <a:ext uri="{FF2B5EF4-FFF2-40B4-BE49-F238E27FC236}">
+              <a16:creationId xmlns:a16="http://schemas.microsoft.com/office/drawing/2014/main" id="{C393372D-F17D-E179-59B0-E379F6F7189C}"/>
+            </a:ext>
+          </a:extLst>
+        </p:cNvPr>
+        <p:cNvGrpSpPr/>
+        <p:nvPr/>
+      </p:nvGrpSpPr>
+      <p:grpSpPr>
+        <a:xfrm>
+          <a:off x="0" y="0"/>
+          <a:ext cx="0" cy="0"/>
+          <a:chOff x="0" y="0"/>
+          <a:chExt cx="0" cy="0"/>
+        </a:xfrm>
+      </p:grpSpPr>
+      <p:pic>
+        <p:nvPicPr>
+          <p:cNvPr id="3" name="Picture 2">
+            <a:extLst>
+              <a:ext uri="{FF2B5EF4-FFF2-40B4-BE49-F238E27FC236}">
+                <a16:creationId xmlns:a16="http://schemas.microsoft.com/office/drawing/2014/main" id="{37489126-C223-F754-364D-97D7CFE08470}"/>
+              </a:ext>
+            </a:extLst>
+          </p:cNvPr>
+          <p:cNvPicPr>
+            <a:picLocks noChangeAspect="1"/>
+          </p:cNvPicPr>
+          <p:nvPr/>
+        </p:nvPicPr>
+        <p:blipFill>
+          <a:blip r:embed="rId2"/>
+          <a:stretch>
+            <a:fillRect/>
+          </a:stretch>
+        </p:blipFill>
+        <p:spPr>
+          <a:xfrm>
+            <a:off x="0" y="0"/>
+            <a:ext cx="12192000" cy="6858000"/>
+          </a:xfrm>
+          <a:prstGeom prst="rect">
+            <a:avLst/>
+          </a:prstGeom>
+        </p:spPr>
+      </p:pic>
+    </p:spTree>
+    <p:extLst>
+      <p:ext uri="{BB962C8B-B14F-4D97-AF65-F5344CB8AC3E}">
+        <p14:creationId xmlns:p14="http://schemas.microsoft.com/office/powerpoint/2010/main" val="1278062219"/>
+      </p:ext>
+    </p:extLst>
+  </p:cSld>
+  <p:clrMapOvr>
+    <a:masterClrMapping/>
+  </p:clrMapOvr>
+</p:sld>
+</file>
+
+<file path=ppt/slides/slide28.xml><?xml version="1.0" encoding="utf-8"?>
 <p:sld xmlns:a="http://schemas.openxmlformats.org/drawingml/2006/main" xmlns:r="http://schemas.openxmlformats.org/officeDocument/2006/relationships" xmlns:p="http://schemas.openxmlformats.org/presentationml/2006/main">
   <p:cSld>
     <p:spTree>
